--- a/data/employees/EMP037/AST-EMP037-01.pptx
+++ b/data/employees/EMP037/AST-EMP037-01.pptx
@@ -9,6 +9,7 @@
     <p:sldId id="257" r:id="rId8"/>
     <p:sldId id="258" r:id="rId9"/>
     <p:sldId id="259" r:id="rId10"/>
+    <p:sldId id="260" r:id="rId11"/>
   </p:sldIdLst>
   <p:sldSz cx="9144000" cy="6858000" type="screen4x3"/>
   <p:notesSz cx="6858000" cy="9144000"/>
@@ -3098,42 +3099,55 @@
             <a:spLocks noGrp="1"/>
           </p:cNvSpPr>
           <p:nvPr>
-            <p:ph type="ctrTitle"/>
-          </p:nvPr>
-        </p:nvSpPr>
-        <p:spPr/>
-        <p:txBody>
-          <a:bodyPr/>
-          <a:lstStyle/>
-          <a:p>
-            <a:r>
-              <a:t>Project update deck - EMP037</a:t>
-            </a:r>
-          </a:p>
-        </p:txBody>
-      </p:sp>
-      <p:sp>
-        <p:nvSpPr>
-          <p:cNvPr id="3" name="Subtitle 2"/>
-          <p:cNvSpPr>
-            <a:spLocks noGrp="1"/>
-          </p:cNvSpPr>
-          <p:nvPr>
-            <p:ph type="subTitle" idx="1"/>
-          </p:nvPr>
-        </p:nvSpPr>
-        <p:spPr/>
-        <p:txBody>
-          <a:bodyPr/>
-          <a:lstStyle/>
-          <a:p>
-            <a:r>
-              <a:t>Riley Patel | Senior Engineer | Procurement</a:t>
-            </a:r>
-          </a:p>
-          <a:p>
-            <a:r>
-              <a:t>Prepared: 2025-02-08</a:t>
+            <p:ph type="title"/>
+          </p:nvPr>
+        </p:nvSpPr>
+        <p:spPr/>
+        <p:txBody>
+          <a:bodyPr/>
+          <a:lstStyle/>
+          <a:p>
+            <a:r>
+              <a:t>Ast Emp037 01 - EMP037</a:t>
+            </a:r>
+          </a:p>
+        </p:txBody>
+      </p:sp>
+      <p:sp>
+        <p:nvSpPr>
+          <p:cNvPr id="3" name="Content Placeholder 2"/>
+          <p:cNvSpPr>
+            <a:spLocks noGrp="1"/>
+          </p:cNvSpPr>
+          <p:nvPr>
+            <p:ph idx="1"/>
+          </p:nvPr>
+        </p:nvSpPr>
+        <p:spPr/>
+        <p:txBody>
+          <a:bodyPr/>
+          <a:lstStyle/>
+          <a:p>
+            <a:r>
+              <a:t>Slide 1: Executive Summary</a:t>
+            </a:r>
+          </a:p>
+          <a:p>
+            <a:pPr lvl="1"/>
+            <a:r>
+              <a:t>Section 1: Quarterly delivery milestones. EMP037 contributes to ast emp037 01 through recurring collaboration, clear ownership boundaries, and measurable outcomes. The team captures decisions, open issues, and handoffs so that knowledge remains discoverable for future programs.</a:t>
+            </a:r>
+          </a:p>
+          <a:p>
+            <a:pPr lvl="1"/>
+            <a:r>
+              <a:t>Section 2: Quarterly delivery milestones. EMP037 contributes to ast emp037 01 through recurring collaboration, clear ownership boundaries, and measurable outcomes. The team captures decisions, open issues, and handoffs so that knowledge remains discoverable for future programs.</a:t>
+            </a:r>
+          </a:p>
+          <a:p>
+            <a:pPr lvl="1"/>
+            <a:r>
+              <a:t>Section 3: Customer escalation analysis. EMP037 contributes to ast emp037 01 through recurring collaboration, clear ownership boundaries, and measurable outcomes. The team captures decisions, open issues, and handoffs so that knowledge remains discoverable for future programs.</a:t>
             </a:r>
           </a:p>
         </p:txBody>
@@ -3172,7 +3186,7 @@
           <a:lstStyle/>
           <a:p>
             <a:r>
-              <a:t>Vendor Scorecard Q2</a:t>
+              <a:t>Ast Emp037 01 - EMP037</a:t>
             </a:r>
           </a:p>
         </p:txBody>
@@ -3193,17 +3207,25 @@
           <a:lstStyle/>
           <a:p>
             <a:r>
-              <a:t>Overview of Vendor Scorecard Q2 for Procurement department.</a:t>
-            </a:r>
-          </a:p>
-          <a:p>
-            <a:r>
-              <a:t>Responsible: Riley Patel (Senior Engineer)</a:t>
-            </a:r>
-          </a:p>
-          <a:p>
-            <a:r>
-              <a:t>Location: Fremont | Skills: Ontology, Kusto, Synapse, SQL</a:t>
+              <a:t>Slide 2: Executive Summary</a:t>
+            </a:r>
+          </a:p>
+          <a:p>
+            <a:pPr lvl="1"/>
+            <a:r>
+              <a:t>Section 1: Data quality remediation. EMP037 contributes to ast emp037 01 through recurring collaboration, clear ownership boundaries, and measurable outcomes. The team captures decisions, open issues, and handoffs so that knowledge remains discoverable for future programs.</a:t>
+            </a:r>
+          </a:p>
+          <a:p>
+            <a:pPr lvl="1"/>
+            <a:r>
+              <a:t>Section 2: Department KPI performance. EMP037 contributes to ast emp037 01 through recurring collaboration, clear ownership boundaries, and measurable outcomes. The team captures decisions, open issues, and handoffs so that knowledge remains discoverable for future programs.</a:t>
+            </a:r>
+          </a:p>
+          <a:p>
+            <a:pPr lvl="1"/>
+            <a:r>
+              <a:t>Section 3: Data quality remediation. EMP037 contributes to ast emp037 01 through recurring collaboration, clear ownership boundaries, and measurable outcomes. The team captures decisions, open issues, and handoffs so that knowledge remains discoverable for future programs.</a:t>
             </a:r>
           </a:p>
         </p:txBody>
@@ -3242,7 +3264,7 @@
           <a:lstStyle/>
           <a:p>
             <a:r>
-              <a:t>Contract Renewals Pipeline</a:t>
+              <a:t>Ast Emp037 01 - EMP037</a:t>
             </a:r>
           </a:p>
         </p:txBody>
@@ -3263,17 +3285,25 @@
           <a:lstStyle/>
           <a:p>
             <a:r>
-              <a:t>Overview of Contract Renewals Pipeline for Procurement department.</a:t>
-            </a:r>
-          </a:p>
-          <a:p>
-            <a:r>
-              <a:t>Responsible: Riley Patel (Senior Engineer)</a:t>
-            </a:r>
-          </a:p>
-          <a:p>
-            <a:r>
-              <a:t>Location: Fremont | Skills: Ontology, Kusto, Synapse, SQL</a:t>
+              <a:t>Slide 3: Executive Summary</a:t>
+            </a:r>
+          </a:p>
+          <a:p>
+            <a:pPr lvl="1"/>
+            <a:r>
+              <a:t>Section 1: Customer escalation analysis. EMP037 contributes to ast emp037 01 through recurring collaboration, clear ownership boundaries, and measurable outcomes. The team captures decisions, open issues, and handoffs so that knowledge remains discoverable for future programs.</a:t>
+            </a:r>
+          </a:p>
+          <a:p>
+            <a:pPr lvl="1"/>
+            <a:r>
+              <a:t>Section 2: Automation backlog refinement. EMP037 contributes to ast emp037 01 through recurring collaboration, clear ownership boundaries, and measurable outcomes. The team captures decisions, open issues, and handoffs so that knowledge remains discoverable for future programs.</a:t>
+            </a:r>
+          </a:p>
+          <a:p>
+            <a:pPr lvl="1"/>
+            <a:r>
+              <a:t>Section 3: Operational risk review. EMP037 contributes to ast emp037 01 through recurring collaboration, clear ownership boundaries, and measurable outcomes. The team captures decisions, open issues, and handoffs so that knowledge remains discoverable for future programs.</a:t>
             </a:r>
           </a:p>
         </p:txBody>
@@ -3312,7 +3342,7 @@
           <a:lstStyle/>
           <a:p>
             <a:r>
-              <a:t>Category Spend Analysis</a:t>
+              <a:t>Ast Emp037 01 - EMP037</a:t>
             </a:r>
           </a:p>
         </p:txBody>
@@ -3333,17 +3363,103 @@
           <a:lstStyle/>
           <a:p>
             <a:r>
-              <a:t>Overview of Category Spend Analysis for Procurement department.</a:t>
-            </a:r>
-          </a:p>
-          <a:p>
-            <a:r>
-              <a:t>Responsible: Riley Patel (Senior Engineer)</a:t>
-            </a:r>
-          </a:p>
-          <a:p>
-            <a:r>
-              <a:t>Location: Fremont | Skills: Ontology, Kusto, Synapse, SQL</a:t>
+              <a:t>Slide 4: Executive Summary</a:t>
+            </a:r>
+          </a:p>
+          <a:p>
+            <a:pPr lvl="1"/>
+            <a:r>
+              <a:t>Section 1: Fabric semantic model planning. EMP037 contributes to ast emp037 01 through recurring collaboration, clear ownership boundaries, and measurable outcomes. The team captures decisions, open issues, and handoffs so that knowledge remains discoverable for future programs.</a:t>
+            </a:r>
+          </a:p>
+          <a:p>
+            <a:pPr lvl="1"/>
+            <a:r>
+              <a:t>Section 2: Data quality remediation. EMP037 contributes to ast emp037 01 through recurring collaboration, clear ownership boundaries, and measurable outcomes. The team captures decisions, open issues, and handoffs so that knowledge remains discoverable for future programs.</a:t>
+            </a:r>
+          </a:p>
+          <a:p>
+            <a:pPr lvl="1"/>
+            <a:r>
+              <a:t>Section 3: Fabric semantic model planning. EMP037 contributes to ast emp037 01 through recurring collaboration, clear ownership boundaries, and measurable outcomes. The team captures decisions, open issues, and handoffs so that knowledge remains discoverable for future programs.</a:t>
+            </a:r>
+          </a:p>
+        </p:txBody>
+      </p:sp>
+    </p:spTree>
+  </p:cSld>
+  <p:clrMapOvr>
+    <a:masterClrMapping/>
+  </p:clrMapOvr>
+</p:sld>
+</file>
+
+<file path=ppt/slides/slide5.xml><?xml version="1.0" encoding="utf-8"?>
+<p:sld xmlns:a="http://schemas.openxmlformats.org/drawingml/2006/main" xmlns:p="http://schemas.openxmlformats.org/presentationml/2006/main" xmlns:r="http://schemas.openxmlformats.org/officeDocument/2006/relationships">
+  <p:cSld>
+    <p:spTree>
+      <p:nvGrpSpPr>
+        <p:cNvPr id="1" name=""/>
+        <p:cNvGrpSpPr/>
+        <p:nvPr/>
+      </p:nvGrpSpPr>
+      <p:grpSpPr/>
+      <p:sp>
+        <p:nvSpPr>
+          <p:cNvPr id="2" name="Title 1"/>
+          <p:cNvSpPr>
+            <a:spLocks noGrp="1"/>
+          </p:cNvSpPr>
+          <p:nvPr>
+            <p:ph type="title"/>
+          </p:nvPr>
+        </p:nvSpPr>
+        <p:spPr/>
+        <p:txBody>
+          <a:bodyPr/>
+          <a:lstStyle/>
+          <a:p>
+            <a:r>
+              <a:t>Ast Emp037 01 - EMP037</a:t>
+            </a:r>
+          </a:p>
+        </p:txBody>
+      </p:sp>
+      <p:sp>
+        <p:nvSpPr>
+          <p:cNvPr id="3" name="Content Placeholder 2"/>
+          <p:cNvSpPr>
+            <a:spLocks noGrp="1"/>
+          </p:cNvSpPr>
+          <p:nvPr>
+            <p:ph idx="1"/>
+          </p:nvPr>
+        </p:nvSpPr>
+        <p:spPr/>
+        <p:txBody>
+          <a:bodyPr/>
+          <a:lstStyle/>
+          <a:p>
+            <a:r>
+              <a:t>Slide 5: Executive Summary</a:t>
+            </a:r>
+          </a:p>
+          <a:p>
+            <a:pPr lvl="1"/>
+            <a:r>
+              <a:t>Section 1: Knowledge transfer and onboarding. EMP037 contributes to ast emp037 01 through recurring collaboration, clear ownership boundaries, and measurable outcomes. The team captures decisions, open issues, and handoffs so that knowledge remains discoverable for future programs.</a:t>
+            </a:r>
+          </a:p>
+          <a:p>
+            <a:pPr lvl="1"/>
+            <a:r>
+              <a:t>Section 2: Fabric semantic model planning. EMP037 contributes to ast emp037 01 through recurring collaboration, clear ownership boundaries, and measurable outcomes. The team captures decisions, open issues, and handoffs so that knowledge remains discoverable for future programs.</a:t>
+            </a:r>
+          </a:p>
+          <a:p>
+            <a:pPr lvl="1"/>
+            <a:r>
+              <a:t>Section 3: Quarterly delivery milestones. EMP037 contributes to ast emp037 01 through recurring collaboration, clear ownership boundaries, and measurable outcomes. The team captures decisions, open issues, and handoffs so that knowledge remains discoverable for future programs.</a:t>
             </a:r>
           </a:p>
         </p:txBody>
